--- a/Web/Flask+Vue.pptx
+++ b/Web/Flask+Vue.pptx
@@ -8,13 +8,14 @@
     <p:notesMasterId r:id="rId4"/>
   </p:notesMasterIdLst>
   <p:handoutMasterIdLst>
-    <p:handoutMasterId r:id="rId8"/>
+    <p:handoutMasterId r:id="rId9"/>
   </p:handoutMasterIdLst>
   <p:sldIdLst>
     <p:sldId id="256" r:id="rId3"/>
     <p:sldId id="257" r:id="rId5"/>
     <p:sldId id="259" r:id="rId6"/>
     <p:sldId id="260" r:id="rId7"/>
+    <p:sldId id="261" r:id="rId8"/>
   </p:sldIdLst>
   <p:sldSz cx="12192000" cy="6858000"/>
   <p:notesSz cx="6858000" cy="9144000"/>
@@ -113,6 +114,22 @@
       </a:defRPr>
     </a:lvl9pPr>
   </p:defaultTextStyle>
+  <p:extLst>
+    <p:ext uri="{EFAFB233-063F-42B5-8137-9DF3F51BA10A}">
+      <p15:sldGuideLst xmlns:p15="http://schemas.microsoft.com/office/powerpoint/2012/main">
+        <p15:guide id="1" orient="horz" pos="2196" userDrawn="1">
+          <p15:clr>
+            <a:srgbClr val="A4A3A4"/>
+          </p15:clr>
+        </p15:guide>
+        <p15:guide id="2" pos="3840" userDrawn="1">
+          <p15:clr>
+            <a:srgbClr val="A4A3A4"/>
+          </p15:clr>
+        </p15:guide>
+      </p15:sldGuideLst>
+    </p:ext>
+  </p:extLst>
 </p:presentation>
 </file>
 
@@ -4332,9 +4349,250 @@
 </p:sld>
 </file>
 
+<file path=ppt/slides/slide5.xml><?xml version="1.0" encoding="utf-8"?>
+<p:sld xmlns:a="http://schemas.openxmlformats.org/drawingml/2006/main" xmlns:r="http://schemas.openxmlformats.org/officeDocument/2006/relationships" xmlns:p="http://schemas.openxmlformats.org/presentationml/2006/main">
+  <p:cSld>
+    <p:spTree>
+      <p:nvGrpSpPr>
+        <p:cNvPr id="1" name=""/>
+        <p:cNvGrpSpPr/>
+        <p:nvPr/>
+      </p:nvGrpSpPr>
+      <p:grpSpPr/>
+      <p:sp>
+        <p:nvSpPr>
+          <p:cNvPr id="2" name="标题 1"/>
+          <p:cNvSpPr>
+            <a:spLocks noGrp="1"/>
+          </p:cNvSpPr>
+          <p:nvPr>
+            <p:ph type="title"/>
+          </p:nvPr>
+        </p:nvSpPr>
+        <p:spPr/>
+        <p:txBody>
+          <a:bodyPr/>
+          <a:p>
+            <a:r>
+              <a:rPr lang="en-US" altLang="zh-CN"/>
+              <a:t>SSR (Server Side Rendering)</a:t>
+            </a:r>
+            <a:endParaRPr lang="en-US" altLang="zh-CN"/>
+          </a:p>
+        </p:txBody>
+      </p:sp>
+      <p:sp>
+        <p:nvSpPr>
+          <p:cNvPr id="3" name="内容占位符 2"/>
+          <p:cNvSpPr>
+            <a:spLocks noGrp="1"/>
+          </p:cNvSpPr>
+          <p:nvPr>
+            <p:ph idx="1"/>
+          </p:nvPr>
+        </p:nvSpPr>
+        <p:spPr>
+          <a:xfrm>
+            <a:off x="838200" y="1211580"/>
+            <a:ext cx="5344160" cy="4549140"/>
+          </a:xfrm>
+        </p:spPr>
+        <p:txBody>
+          <a:bodyPr/>
+          <a:p>
+            <a:r>
+              <a:rPr lang="en-US" altLang="zh-CN"/>
+              <a:t>Solution</a:t>
+            </a:r>
+            <a:endParaRPr lang="en-US" altLang="zh-CN"/>
+          </a:p>
+          <a:p>
+            <a:pPr lvl="1"/>
+            <a:r>
+              <a:rPr lang="en-US" altLang="zh-CN"/>
+              <a:t>Vue</a:t>
+            </a:r>
+            <a:endParaRPr lang="en-US" altLang="zh-CN"/>
+          </a:p>
+          <a:p>
+            <a:pPr lvl="2"/>
+            <a:r>
+              <a:rPr lang="en-US" altLang="zh-CN"/>
+              <a:t>vue add ssr</a:t>
+            </a:r>
+            <a:endParaRPr lang="en-US" altLang="zh-CN"/>
+          </a:p>
+          <a:p>
+            <a:pPr lvl="3"/>
+            <a:r>
+              <a:rPr lang="en-US" altLang="zh-CN"/>
+              <a:t>src/entry-client.js</a:t>
+            </a:r>
+            <a:endParaRPr lang="en-US" altLang="zh-CN"/>
+          </a:p>
+          <a:p>
+            <a:pPr lvl="3"/>
+            <a:r>
+              <a:rPr lang="en-US" altLang="zh-CN"/>
+              <a:t>src/entry-server.js</a:t>
+            </a:r>
+            <a:endParaRPr lang="en-US" altLang="zh-CN"/>
+          </a:p>
+          <a:p>
+            <a:pPr lvl="1"/>
+            <a:r>
+              <a:rPr lang="en-US" altLang="zh-CN"/>
+              <a:t>Flask</a:t>
+            </a:r>
+            <a:endParaRPr lang="en-US" altLang="zh-CN"/>
+          </a:p>
+          <a:p>
+            <a:pPr lvl="2"/>
+            <a:r>
+              <a:rPr lang="en-US" altLang="zh-CN"/>
+              <a:t>Flask </a:t>
+            </a:r>
+            <a:r>
+              <a:rPr lang="zh-CN" altLang="en-US"/>
+              <a:t>能够调用</a:t>
+            </a:r>
+            <a:r>
+              <a:rPr lang="en-US" altLang="zh-CN"/>
+              <a:t> Vue </a:t>
+            </a:r>
+            <a:r>
+              <a:rPr lang="zh-CN" altLang="en-US"/>
+              <a:t>渲染器来生成页面内容</a:t>
+            </a:r>
+            <a:endParaRPr lang="zh-CN" altLang="en-US"/>
+          </a:p>
+          <a:p>
+            <a:pPr lvl="2"/>
+            <a:r>
+              <a:rPr lang="en-US" altLang="zh-CN"/>
+              <a:t>flask-vuejs</a:t>
+            </a:r>
+            <a:endParaRPr lang="en-US" altLang="zh-CN"/>
+          </a:p>
+        </p:txBody>
+      </p:sp>
+      <p:sp>
+        <p:nvSpPr>
+          <p:cNvPr id="4" name="文本框 3"/>
+          <p:cNvSpPr txBox="1"/>
+          <p:nvPr/>
+        </p:nvSpPr>
+        <p:spPr>
+          <a:xfrm>
+            <a:off x="6889750" y="1205865"/>
+            <a:ext cx="4664710" cy="2030095"/>
+          </a:xfrm>
+          <a:prstGeom prst="rect">
+            <a:avLst/>
+          </a:prstGeom>
+          <a:noFill/>
+          <a:ln>
+            <a:solidFill>
+              <a:srgbClr val="C00000"/>
+            </a:solidFill>
+          </a:ln>
+        </p:spPr>
+        <p:txBody>
+          <a:bodyPr wrap="square" rtlCol="0">
+            <a:spAutoFit/>
+          </a:bodyPr>
+          <a:p>
+            <a:r>
+              <a:rPr lang="en-US" altLang="zh-CN" sz="1400"/>
+              <a:t>def render_vue_app(url):</a:t>
+            </a:r>
+            <a:endParaRPr lang="en-US" altLang="zh-CN" sz="1400"/>
+          </a:p>
+          <a:p>
+            <a:r>
+              <a:rPr lang="en-US" altLang="zh-CN" sz="1400"/>
+              <a:t>    # </a:t>
+            </a:r>
+            <a:r>
+              <a:rPr lang="zh-CN" altLang="en-US" sz="1400"/>
+              <a:t>假设你有一个命令行工具或脚本可以直接渲染</a:t>
+            </a:r>
+            <a:r>
+              <a:rPr lang="en-US" altLang="zh-CN" sz="1400"/>
+              <a:t> Vue </a:t>
+            </a:r>
+            <a:r>
+              <a:rPr lang="zh-CN" altLang="en-US" sz="1400"/>
+              <a:t>应用</a:t>
+            </a:r>
+            <a:endParaRPr lang="zh-CN" altLang="en-US" sz="1400"/>
+          </a:p>
+          <a:p>
+            <a:r>
+              <a:rPr lang="en-US" altLang="zh-CN" sz="1400"/>
+              <a:t>    result = subprocess.run(</a:t>
+            </a:r>
+            <a:endParaRPr lang="en-US" altLang="zh-CN" sz="1400"/>
+          </a:p>
+          <a:p>
+            <a:r>
+              <a:rPr lang="en-US" altLang="zh-CN" sz="1400"/>
+              <a:t>        ['node', 'path/to/renderVueApp.js', url],</a:t>
+            </a:r>
+            <a:endParaRPr lang="en-US" altLang="zh-CN" sz="1400"/>
+          </a:p>
+          <a:p>
+            <a:r>
+              <a:rPr lang="en-US" altLang="zh-CN" sz="1400"/>
+              <a:t>        capture_output=True,</a:t>
+            </a:r>
+            <a:endParaRPr lang="en-US" altLang="zh-CN" sz="1400"/>
+          </a:p>
+          <a:p>
+            <a:r>
+              <a:rPr lang="en-US" altLang="zh-CN" sz="1400"/>
+              <a:t>        text=True</a:t>
+            </a:r>
+            <a:endParaRPr lang="en-US" altLang="zh-CN" sz="1400"/>
+          </a:p>
+          <a:p>
+            <a:r>
+              <a:rPr lang="en-US" altLang="zh-CN" sz="1400"/>
+              <a:t>    )</a:t>
+            </a:r>
+            <a:endParaRPr lang="en-US" altLang="zh-CN" sz="1400"/>
+          </a:p>
+          <a:p>
+            <a:r>
+              <a:rPr lang="en-US" altLang="zh-CN" sz="1400"/>
+              <a:t>    return result.stdout</a:t>
+            </a:r>
+            <a:endParaRPr lang="en-US" altLang="zh-CN" sz="1400"/>
+          </a:p>
+        </p:txBody>
+      </p:sp>
+    </p:spTree>
+    <p:custDataLst>
+      <p:tags r:id="rId1"/>
+    </p:custDataLst>
+  </p:cSld>
+  <p:clrMapOvr>
+    <a:masterClrMapping/>
+  </p:clrMapOvr>
+</p:sld>
+</file>
+
 <file path=ppt/tags/tag1.xml><?xml version="1.0" encoding="utf-8"?>
 <p:tagLst xmlns:p="http://schemas.openxmlformats.org/presentationml/2006/main">
   <p:tag name="KSO_WM_TAG_VERSION" val="1.0"/>
+  <p:tag name="KSO_WM_TEMPLATE_CATEGORY" val="custom"/>
+  <p:tag name="KSO_WM_TEMPLATE_INDEX" val="160402"/>
+</p:tagLst>
+</file>
+
+<file path=ppt/tags/tag10.xml><?xml version="1.0" encoding="utf-8"?>
+<p:tagLst xmlns:p="http://schemas.openxmlformats.org/presentationml/2006/main">
+  <p:tag name="KSO_WM_BEAUTIFY_FLAG" val="#wm#"/>
   <p:tag name="KSO_WM_TEMPLATE_CATEGORY" val="custom"/>
   <p:tag name="KSO_WM_TEMPLATE_INDEX" val="160402"/>
 </p:tagLst>
